--- a/presentation.pptx
+++ b/presentation.pptx
@@ -899,7 +899,7 @@
           <a:p>
             <a:r>
               <a:rPr lang="en-US" dirty="0"/>
-              <a:t>Say early: the subject is the framework assessment loop. The published table is the worked example, and the use case behind it is one of several, never the target. This is a gap the deliverable documented itself, which is what honest assessment looks like.</a:t>
+              <a:t>Say early: the subject is the framework assessment loop. The published table is the worked example, and the use case behind it is one of several, never the target. The deliverable documented this gap itself.</a:t>
             </a:r>
             <a:endParaRPr lang="en-US" dirty="0"/>
           </a:p>
@@ -1075,7 +1075,7 @@
           <a:p>
             <a:r>
               <a:rPr lang="en-US" dirty="0"/>
-              <a:t>SESSION SLOT: after the hour-1 rerun, update the three bar values and the recall numbers with the live run. Say the runtime caveat out loud, do not wait to be asked.</a:t>
+              <a:t>SESSION SLOT: after the hour-1 rerun, update the three bar values and the recall numbers with the live run. State the runtime caveat unprompted.</a:t>
             </a:r>
             <a:endParaRPr lang="en-US" dirty="0"/>
           </a:p>
@@ -2814,7 +2814,7 @@
                 <a:ea typeface="Calibri" pitchFamily="34" charset="-122"/>
                 <a:cs typeface="Calibri" pitchFamily="34" charset="-120"/>
               </a:rPr>
-              <a:t>The deliverable documented this gap itself. We built the instrument that pays the debt down.</a:t>
+              <a:t>The deliverable documented this gap itself. We built the instrument for it.</a:t>
             </a:r>
             <a:endParaRPr lang="en-US" sz="1500" dirty="0"/>
           </a:p>
@@ -4379,7 +4379,7 @@
                 <a:ea typeface="Courier New" pitchFamily="34" charset="-122"/>
                 <a:cs typeface="Courier New" pitchFamily="34" charset="-120"/>
               </a:rPr>
-              <a:t>gate tested: 6/6 verdicts · 3/3 tamper caught · 3/3 canonicalization · verify p95 0.246 ms · 0 network calls</a:t>
+              <a:t>gate tested: 6/6 verdicts · 3/3 tamper caught · 3/3 canonicalization · verify p95 under 0.25 ms · 0 network calls</a:t>
             </a:r>
             <a:endParaRPr lang="en-US" sz="1150" dirty="0"/>
           </a:p>
@@ -5698,7 +5698,7 @@
                 <a:ea typeface="Calibri" pitchFamily="34" charset="-122"/>
                 <a:cs typeface="Calibri" pitchFamily="34" charset="-120"/>
               </a:rPr>
-              <a:t>MANOLO-shaped and adapter-ready, never claimed compatible · speaks IDP YAML and AIWorkloadID · no receipts, attestation, or signing anywhere in the five public deliverables (checked)</a:t>
+              <a:t>MANOLO-shaped and adapter-ready, never claimed compatible · speaks IPD YAML and AIWorkloadID · no receipts, attestation, or signing anywhere in the five public deliverables (checked)</a:t>
             </a:r>
             <a:endParaRPr lang="en-US" sz="1150" dirty="0"/>
           </a:p>
@@ -6367,7 +6367,7 @@
                 <a:ea typeface="Calibri" pitchFamily="34" charset="-122"/>
                 <a:cs typeface="Calibri" pitchFamily="34" charset="-120"/>
               </a:rPr>
-              <a:t>Hand-over ready. Dublin, October 20.</a:t>
+              <a:t>Ready to hand over. Dublin, October 20.</a:t>
             </a:r>
             <a:endParaRPr lang="en-US" sz="1600" dirty="0"/>
           </a:p>
@@ -6406,7 +6406,7 @@
                 <a:ea typeface="Courier New" pitchFamily="34" charset="-122"/>
                 <a:cs typeface="Courier New" pitchFamily="34" charset="-120"/>
               </a:rPr>
-              <a:t>github.com/adambkovacs · Apache-2.0 · every verdict replays from the repo</a:t>
+              <a:t>github.com/adambkovacs/manolo-innovation-lab-bench · Apache-2.0 · every verdict replays from the repo</a:t>
             </a:r>
             <a:endParaRPr lang="en-US" sz="1300" dirty="0"/>
           </a:p>

--- a/presentation.pptx
+++ b/presentation.pptx
@@ -5523,7 +5523,7 @@
                 <a:ea typeface="Calibri" pitchFamily="34" charset="-122"/>
                 <a:cs typeface="Calibri" pitchFamily="34" charset="-120"/>
               </a:rPr>
-              <a:t>D6.1 CAE in Z-Inspection</a:t>
+              <a:t>D6.1 CAE in Z-Inspection®</a:t>
             </a:r>
             <a:endParaRPr lang="en-US" sz="1400" dirty="0"/>
           </a:p>

--- a/presentation.pptx
+++ b/presentation.pptx
@@ -5450,7 +5450,7 @@
                 <a:ea typeface="Calibri" pitchFamily="34" charset="-122"/>
                 <a:cs typeface="Calibri" pitchFamily="34" charset="-120"/>
               </a:rPr>
-              <a:t>Live alerts on metric streams. No persisted verdict artifact.</a:t>
+              <a:t>Alerts on policy violations, logged. No claim-verdict artifact.</a:t>
             </a:r>
             <a:endParaRPr lang="en-US" sz="1150" dirty="0"/>
           </a:p>
@@ -5698,7 +5698,7 @@
                 <a:ea typeface="Calibri" pitchFamily="34" charset="-122"/>
                 <a:cs typeface="Calibri" pitchFamily="34" charset="-120"/>
               </a:rPr>
-              <a:t>MANOLO-shaped and adapter-ready, never claimed compatible · speaks IPD YAML and AIWorkloadID · no receipts, attestation, or signing anywhere in the five public deliverables (checked)</a:t>
+              <a:t>MANOLO-shaped and adapter-ready, never claimed compatible · speaks IPD YAML and AIWorkloadID · no receipts, attestation, or signing anywhere in the nine public deliverables (checked)</a:t>
             </a:r>
             <a:endParaRPr lang="en-US" sz="1150" dirty="0"/>
           </a:p>

--- a/presentation.pptx
+++ b/presentation.pptx
@@ -6289,7 +6289,7 @@
                 <a:ea typeface="Calibri" pitchFamily="34" charset="-122"/>
                 <a:cs typeface="Calibri" pitchFamily="34" charset="-120"/>
               </a:rPr>
-              <a:t>Adopt the contract before Trust in the Loop</a:t>
+              <a:t>Worth adopting? Thirty minutes with WP5 decides</a:t>
             </a:r>
             <a:endParaRPr lang="en-US" sz="3400" dirty="0"/>
           </a:p>

--- a/presentation.pptx
+++ b/presentation.pptx
@@ -2193,7 +2193,7 @@
                 <a:ea typeface="Calibri" pitchFamily="34" charset="-122"/>
                 <a:cs typeface="Calibri" pitchFamily="34" charset="-120"/>
               </a:rPr>
-              <a:t>Fourteen of fifteen claims lack direct evidence</a:t>
+              <a:t>8 cite no direct evidence, 6 require validation, 1 cites evidence</a:t>
             </a:r>
             <a:endParaRPr lang="en-US" sz="3200" dirty="0"/>
           </a:p>
@@ -2232,7 +2232,7 @@
                 <a:ea typeface="Calibri" pitchFamily="34" charset="-122"/>
                 <a:cs typeface="Calibri" pitchFamily="34" charset="-120"/>
               </a:rPr>
-              <a:t>14 / 15</a:t>
+              <a:t>8 · 6 · 1</a:t>
             </a:r>
             <a:endParaRPr lang="en-US" sz="8400" dirty="0"/>
           </a:p>
@@ -4129,7 +4129,7 @@
                 <a:ea typeface="Calibri" pitchFamily="34" charset="-122"/>
                 <a:cs typeface="Calibri" pitchFamily="34" charset="-120"/>
               </a:rPr>
-              <a:t>3.94x smaller, 3.4x faster, every number replays</a:t>
+              <a:t>We tried to break the gate before asking you to trust it</a:t>
             </a:r>
             <a:endParaRPr lang="en-US" sz="3200" dirty="0"/>
           </a:p>
@@ -4379,7 +4379,7 @@
                 <a:ea typeface="Courier New" pitchFamily="34" charset="-122"/>
                 <a:cs typeface="Courier New" pitchFamily="34" charset="-120"/>
               </a:rPr>
-              <a:t>gate tested: 6/6 verdicts · 3/3 tamper caught · 3/3 canonicalization · verify p95 under 0.25 ms · 0 network calls</a:t>
+              <a:t>7/7 verdicts incl. hard-inside-margin · unauthorised signer rejected · wrong verdict caught by replay · 3/3 tamper caught · verify p95 under 0.25 ms · 0 outbound attempts</a:t>
             </a:r>
             <a:endParaRPr lang="en-US" sz="1150" dirty="0"/>
           </a:p>
@@ -6289,7 +6289,7 @@
                 <a:ea typeface="Calibri" pitchFamily="34" charset="-122"/>
                 <a:cs typeface="Calibri" pitchFamily="34" charset="-120"/>
               </a:rPr>
-              <a:t>Worth adopting? Thirty minutes with WP5 decides</a:t>
+              <a:t>Pilot it on one WP5 claim table</a:t>
             </a:r>
             <a:endParaRPr lang="en-US" sz="3400" dirty="0"/>
           </a:p>
@@ -6367,7 +6367,7 @@
                 <a:ea typeface="Calibri" pitchFamily="34" charset="-122"/>
                 <a:cs typeface="Calibri" pitchFamily="34" charset="-120"/>
               </a:rPr>
-              <a:t>Ready to hand over. Dublin, October 20.</a:t>
+              <a:t>Trust in the loop needs evidence in the loop.</a:t>
             </a:r>
             <a:endParaRPr lang="en-US" sz="1600" dirty="0"/>
           </a:p>

--- a/presentation.pptx
+++ b/presentation.pptx
@@ -5698,7 +5698,7 @@
                 <a:ea typeface="Calibri" pitchFamily="34" charset="-122"/>
                 <a:cs typeface="Calibri" pitchFamily="34" charset="-120"/>
               </a:rPr>
-              <a:t>MANOLO-shaped and adapter-ready, never claimed compatible · speaks IPD YAML and AIWorkloadID · no receipts, attestation, or signing anywhere in the nine public deliverables (checked)</a:t>
+              <a:t>Every ingredient exists (Ed25519, hash chains, attestation: in-toto and Sigstore territory); the contribution is the claim contract binding threshold, accepted origins, verdict, and disposition into one replayable artifact · MANOLO-shaped, never claimed compatible · no claim-verdict artifacts in the nine reviewed deliverables</a:t>
             </a:r>
             <a:endParaRPr lang="en-US" sz="1150" dirty="0"/>
           </a:p>
